--- a/11а клас/РС/7. Свързване на приложения с бази от данни/02. SQL заявки в C#.pptx
+++ b/11а клас/РС/7. Свързване на приложения с бази от данни/02. SQL заявки в C#.pptx
@@ -20,6 +20,8 @@
     <p:sldId id="644" r:id="rId11"/>
     <p:sldId id="645" r:id="rId12"/>
     <p:sldId id="572" r:id="rId13"/>
+    <p:sldId id="646" r:id="rId21"/>
+    <p:sldId id="647" r:id="rId22"/>
   </p:sldIdLst>
   <p:sldSz cx="12192000" cy="6858000"/>
   <p:notesSz cx="6858000" cy="9144000"/>
@@ -968,7 +970,9 @@
           <a:bodyPr/>
           <a:lstStyle/>
           <a:p>
-            <a:endParaRPr lang="bg-BG"/>
+            <a:r>
+              <a:t>Три класа: SqlConnection, SqlCommand, SqlDataReader. Нарисувайте на дъската како взаимодействат.</a:t>
+            </a:r>
           </a:p>
         </p:txBody>
       </p:sp>
@@ -1053,6 +1057,216 @@
         <p14:creationId xmlns:p14="http://schemas.microsoft.com/office/powerpoint/2010/main" val="4272781246"/>
       </p:ext>
     </p:extLst>
+  </p:cSld>
+  <p:clrMapOvr>
+    <a:masterClrMapping/>
+  </p:clrMapOvr>
+</p:notes>
+</file>
+
+<file path=ppt/notesSlides/notesSlide10.xml><?xml version="1.0" encoding="utf-8"?>
+<p:notes xmlns:a="http://schemas.openxmlformats.org/drawingml/2006/main" xmlns:p="http://schemas.openxmlformats.org/presentationml/2006/main" xmlns:r="http://schemas.openxmlformats.org/officeDocument/2006/relationships">
+  <p:cSld>
+    <p:spTree>
+      <p:nvGrpSpPr>
+        <p:cNvPr id="1" name=""/>
+        <p:cNvGrpSpPr/>
+        <p:nvPr/>
+      </p:nvGrpSpPr>
+      <p:grpSpPr>
+        <a:xfrm>
+          <a:off x="0" y="0"/>
+          <a:ext cx="0" cy="0"/>
+          <a:chOff x="0" y="0"/>
+          <a:chExt cx="0" cy="0"/>
+        </a:xfrm>
+      </p:grpSpPr>
+      <p:sp>
+        <p:nvSpPr>
+          <p:cNvPr id="2" name="Slide Image Placeholder 1"/>
+          <p:cNvSpPr>
+            <a:spLocks noGrp="1"/>
+          </p:cNvSpPr>
+          <p:nvPr>
+            <p:ph type="sldImg" idx="2"/>
+          </p:nvPr>
+        </p:nvSpPr>
+        <p:spPr/>
+      </p:sp>
+      <p:sp>
+        <p:nvSpPr>
+          <p:cNvPr id="3" name="Notes Placeholder 2"/>
+          <p:cNvSpPr>
+            <a:spLocks noGrp="1"/>
+          </p:cNvSpPr>
+          <p:nvPr>
+            <p:ph type="body" idx="3" sz="quarter"/>
+          </p:nvPr>
+        </p:nvSpPr>
+        <p:spPr/>
+        <p:txBody>
+          <a:bodyPr/>
+          <a:lstStyle/>
+          <a:p>
+            <a:r>
+              <a:t>Целият шаблон: Connection → Command → Reader → цикъл Read(). Накарайте учениците да го напишат сами.</a:t>
+            </a:r>
+          </a:p>
+        </p:txBody>
+      </p:sp>
+      <p:sp>
+        <p:nvSpPr>
+          <p:cNvPr id="4" name="Slide Number Placeholder 3"/>
+          <p:cNvSpPr>
+            <a:spLocks noGrp="1"/>
+          </p:cNvSpPr>
+          <p:nvPr>
+            <p:ph type="sldNum" idx="5" sz="quarter"/>
+          </p:nvPr>
+        </p:nvSpPr>
+        <p:spPr/>
+      </p:sp>
+    </p:spTree>
+  </p:cSld>
+  <p:clrMapOvr>
+    <a:masterClrMapping/>
+  </p:clrMapOvr>
+</p:notes>
+</file>
+
+<file path=ppt/notesSlides/notesSlide11.xml><?xml version="1.0" encoding="utf-8"?>
+<p:notes xmlns:a="http://schemas.openxmlformats.org/drawingml/2006/main" xmlns:p="http://schemas.openxmlformats.org/presentationml/2006/main" xmlns:r="http://schemas.openxmlformats.org/officeDocument/2006/relationships">
+  <p:cSld>
+    <p:spTree>
+      <p:nvGrpSpPr>
+        <p:cNvPr id="1" name=""/>
+        <p:cNvGrpSpPr/>
+        <p:nvPr/>
+      </p:nvGrpSpPr>
+      <p:grpSpPr>
+        <a:xfrm>
+          <a:off x="0" y="0"/>
+          <a:ext cx="0" cy="0"/>
+          <a:chOff x="0" y="0"/>
+          <a:chExt cx="0" cy="0"/>
+        </a:xfrm>
+      </p:grpSpPr>
+      <p:sp>
+        <p:nvSpPr>
+          <p:cNvPr id="2" name="Slide Image Placeholder 1"/>
+          <p:cNvSpPr>
+            <a:spLocks noGrp="1"/>
+          </p:cNvSpPr>
+          <p:nvPr>
+            <p:ph type="sldImg" idx="2"/>
+          </p:nvPr>
+        </p:nvSpPr>
+        <p:spPr/>
+      </p:sp>
+      <p:sp>
+        <p:nvSpPr>
+          <p:cNvPr id="3" name="Notes Placeholder 2"/>
+          <p:cNvSpPr>
+            <a:spLocks noGrp="1"/>
+          </p:cNvSpPr>
+          <p:nvPr>
+            <p:ph type="body" idx="3" sz="quarter"/>
+          </p:nvPr>
+        </p:nvSpPr>
+        <p:spPr/>
+        <p:txBody>
+          <a:bodyPr/>
+          <a:lstStyle/>
+          <a:p>
+            <a:r>
+              <a:t>Направете таблица на дъската: Метод | Резултат | Кога.</a:t>
+            </a:r>
+          </a:p>
+        </p:txBody>
+      </p:sp>
+      <p:sp>
+        <p:nvSpPr>
+          <p:cNvPr id="4" name="Slide Number Placeholder 3"/>
+          <p:cNvSpPr>
+            <a:spLocks noGrp="1"/>
+          </p:cNvSpPr>
+          <p:nvPr>
+            <p:ph type="sldNum" idx="5" sz="quarter"/>
+          </p:nvPr>
+        </p:nvSpPr>
+        <p:spPr/>
+      </p:sp>
+    </p:spTree>
+  </p:cSld>
+  <p:clrMapOvr>
+    <a:masterClrMapping/>
+  </p:clrMapOvr>
+</p:notes>
+</file>
+
+<file path=ppt/notesSlides/notesSlide12.xml><?xml version="1.0" encoding="utf-8"?>
+<p:notes xmlns:a="http://schemas.openxmlformats.org/drawingml/2006/main" xmlns:p="http://schemas.openxmlformats.org/presentationml/2006/main" xmlns:r="http://schemas.openxmlformats.org/officeDocument/2006/relationships">
+  <p:cSld>
+    <p:spTree>
+      <p:nvGrpSpPr>
+        <p:cNvPr id="1" name=""/>
+        <p:cNvGrpSpPr/>
+        <p:nvPr/>
+      </p:nvGrpSpPr>
+      <p:grpSpPr>
+        <a:xfrm>
+          <a:off x="0" y="0"/>
+          <a:ext cx="0" cy="0"/>
+          <a:chOff x="0" y="0"/>
+          <a:chExt cx="0" cy="0"/>
+        </a:xfrm>
+      </p:grpSpPr>
+      <p:sp>
+        <p:nvSpPr>
+          <p:cNvPr id="2" name="Slide Image Placeholder 1"/>
+          <p:cNvSpPr>
+            <a:spLocks noGrp="1"/>
+          </p:cNvSpPr>
+          <p:nvPr>
+            <p:ph type="sldImg" idx="2"/>
+          </p:nvPr>
+        </p:nvSpPr>
+        <p:spPr/>
+      </p:sp>
+      <p:sp>
+        <p:nvSpPr>
+          <p:cNvPr id="3" name="Notes Placeholder 2"/>
+          <p:cNvSpPr>
+            <a:spLocks noGrp="1"/>
+          </p:cNvSpPr>
+          <p:nvPr>
+            <p:ph type="body" idx="3" sz="quarter"/>
+          </p:nvPr>
+        </p:nvSpPr>
+        <p:spPr/>
+        <p:txBody>
+          <a:bodyPr/>
+          <a:lstStyle/>
+          <a:p>
+            <a:r>
+              <a:t>Накарайте учениците да напишат този код без да гледат.</a:t>
+            </a:r>
+          </a:p>
+        </p:txBody>
+      </p:sp>
+      <p:sp>
+        <p:nvSpPr>
+          <p:cNvPr id="4" name="Slide Number Placeholder 3"/>
+          <p:cNvSpPr>
+            <a:spLocks noGrp="1"/>
+          </p:cNvSpPr>
+          <p:nvPr>
+            <p:ph type="sldNum" idx="5" sz="quarter"/>
+          </p:nvPr>
+        </p:nvSpPr>
+        <p:spPr/>
+      </p:sp>
+    </p:spTree>
   </p:cSld>
   <p:clrMapOvr>
     <a:masterClrMapping/>
@@ -1104,7 +1318,9 @@
           <a:bodyPr/>
           <a:lstStyle/>
           <a:p>
-            <a:endParaRPr lang="en-US"/>
+            <a:r>
+              <a:t>Трите класа работят ЗАЕДНО. Command не може без Connection, Reader не може без Command.</a:t>
+            </a:r>
           </a:p>
         </p:txBody>
       </p:sp>
@@ -1213,6 +1429,496 @@
         <p14:creationId xmlns:p14="http://schemas.microsoft.com/office/powerpoint/2010/main" val="188400095"/>
       </p:ext>
     </p:extLst>
+  </p:cSld>
+  <p:clrMapOvr>
+    <a:masterClrMapping/>
+  </p:clrMapOvr>
+</p:notes>
+</file>
+
+<file path=ppt/notesSlides/notesSlide3.xml><?xml version="1.0" encoding="utf-8"?>
+<p:notes xmlns:a="http://schemas.openxmlformats.org/drawingml/2006/main" xmlns:p="http://schemas.openxmlformats.org/presentationml/2006/main" xmlns:r="http://schemas.openxmlformats.org/officeDocument/2006/relationships">
+  <p:cSld>
+    <p:spTree>
+      <p:nvGrpSpPr>
+        <p:cNvPr id="1" name=""/>
+        <p:cNvGrpSpPr/>
+        <p:nvPr/>
+      </p:nvGrpSpPr>
+      <p:grpSpPr>
+        <a:xfrm>
+          <a:off x="0" y="0"/>
+          <a:ext cx="0" cy="0"/>
+          <a:chOff x="0" y="0"/>
+          <a:chExt cx="0" cy="0"/>
+        </a:xfrm>
+      </p:grpSpPr>
+      <p:sp>
+        <p:nvSpPr>
+          <p:cNvPr id="2" name="Slide Image Placeholder 1"/>
+          <p:cNvSpPr>
+            <a:spLocks noGrp="1"/>
+          </p:cNvSpPr>
+          <p:nvPr>
+            <p:ph type="sldImg" idx="2"/>
+          </p:nvPr>
+        </p:nvSpPr>
+        <p:spPr/>
+      </p:sp>
+      <p:sp>
+        <p:nvSpPr>
+          <p:cNvPr id="3" name="Notes Placeholder 2"/>
+          <p:cNvSpPr>
+            <a:spLocks noGrp="1"/>
+          </p:cNvSpPr>
+          <p:nvPr>
+            <p:ph type="body" idx="3" sz="quarter"/>
+          </p:nvPr>
+        </p:nvSpPr>
+        <p:spPr/>
+        <p:txBody>
+          <a:bodyPr/>
+          <a:lstStyle/>
+          <a:p>
+            <a:r>
+              <a:t>Денес ще напишем първите реални C# програми, които отварят връзка към БД.</a:t>
+            </a:r>
+          </a:p>
+        </p:txBody>
+      </p:sp>
+      <p:sp>
+        <p:nvSpPr>
+          <p:cNvPr id="4" name="Slide Number Placeholder 3"/>
+          <p:cNvSpPr>
+            <a:spLocks noGrp="1"/>
+          </p:cNvSpPr>
+          <p:nvPr>
+            <p:ph type="sldNum" idx="5" sz="quarter"/>
+          </p:nvPr>
+        </p:nvSpPr>
+        <p:spPr/>
+      </p:sp>
+    </p:spTree>
+  </p:cSld>
+  <p:clrMapOvr>
+    <a:masterClrMapping/>
+  </p:clrMapOvr>
+</p:notes>
+</file>
+
+<file path=ppt/notesSlides/notesSlide4.xml><?xml version="1.0" encoding="utf-8"?>
+<p:notes xmlns:a="http://schemas.openxmlformats.org/drawingml/2006/main" xmlns:p="http://schemas.openxmlformats.org/presentationml/2006/main" xmlns:r="http://schemas.openxmlformats.org/officeDocument/2006/relationships">
+  <p:cSld>
+    <p:spTree>
+      <p:nvGrpSpPr>
+        <p:cNvPr id="1" name=""/>
+        <p:cNvGrpSpPr/>
+        <p:nvPr/>
+      </p:nvGrpSpPr>
+      <p:grpSpPr>
+        <a:xfrm>
+          <a:off x="0" y="0"/>
+          <a:ext cx="0" cy="0"/>
+          <a:chOff x="0" y="0"/>
+          <a:chExt cx="0" cy="0"/>
+        </a:xfrm>
+      </p:grpSpPr>
+      <p:sp>
+        <p:nvSpPr>
+          <p:cNvPr id="2" name="Slide Image Placeholder 1"/>
+          <p:cNvSpPr>
+            <a:spLocks noGrp="1"/>
+          </p:cNvSpPr>
+          <p:nvPr>
+            <p:ph type="sldImg" idx="2"/>
+          </p:nvPr>
+        </p:nvSpPr>
+        <p:spPr/>
+      </p:sp>
+      <p:sp>
+        <p:nvSpPr>
+          <p:cNvPr id="3" name="Notes Placeholder 2"/>
+          <p:cNvSpPr>
+            <a:spLocks noGrp="1"/>
+          </p:cNvSpPr>
+          <p:nvPr>
+            <p:ph type="body" idx="3" sz="quarter"/>
+          </p:nvPr>
+        </p:nvSpPr>
+        <p:spPr/>
+        <p:txBody>
+          <a:bodyPr/>
+          <a:lstStyle/>
+          <a:p>
+            <a:r>
+              <a:t>Connection string: Server=.\\SQLEXPRESS (локален); Database=Northwind (коя БД); Integrated Security=true (без парола). НЕ слагайте пароли директно в кода!</a:t>
+            </a:r>
+          </a:p>
+        </p:txBody>
+      </p:sp>
+      <p:sp>
+        <p:nvSpPr>
+          <p:cNvPr id="4" name="Slide Number Placeholder 3"/>
+          <p:cNvSpPr>
+            <a:spLocks noGrp="1"/>
+          </p:cNvSpPr>
+          <p:nvPr>
+            <p:ph type="sldNum" idx="5" sz="quarter"/>
+          </p:nvPr>
+        </p:nvSpPr>
+        <p:spPr/>
+      </p:sp>
+    </p:spTree>
+  </p:cSld>
+  <p:clrMapOvr>
+    <a:masterClrMapping/>
+  </p:clrMapOvr>
+</p:notes>
+</file>
+
+<file path=ppt/notesSlides/notesSlide5.xml><?xml version="1.0" encoding="utf-8"?>
+<p:notes xmlns:a="http://schemas.openxmlformats.org/drawingml/2006/main" xmlns:p="http://schemas.openxmlformats.org/presentationml/2006/main" xmlns:r="http://schemas.openxmlformats.org/officeDocument/2006/relationships">
+  <p:cSld>
+    <p:spTree>
+      <p:nvGrpSpPr>
+        <p:cNvPr id="1" name=""/>
+        <p:cNvGrpSpPr/>
+        <p:nvPr/>
+      </p:nvGrpSpPr>
+      <p:grpSpPr>
+        <a:xfrm>
+          <a:off x="0" y="0"/>
+          <a:ext cx="0" cy="0"/>
+          <a:chOff x="0" y="0"/>
+          <a:chExt cx="0" cy="0"/>
+        </a:xfrm>
+      </p:grpSpPr>
+      <p:sp>
+        <p:nvSpPr>
+          <p:cNvPr id="2" name="Slide Image Placeholder 1"/>
+          <p:cNvSpPr>
+            <a:spLocks noGrp="1"/>
+          </p:cNvSpPr>
+          <p:nvPr>
+            <p:ph type="sldImg" idx="2"/>
+          </p:nvPr>
+        </p:nvSpPr>
+        <p:spPr/>
+      </p:sp>
+      <p:sp>
+        <p:nvSpPr>
+          <p:cNvPr id="3" name="Notes Placeholder 2"/>
+          <p:cNvSpPr>
+            <a:spLocks noGrp="1"/>
+          </p:cNvSpPr>
+          <p:nvPr>
+            <p:ph type="body" idx="3" sz="quarter"/>
+          </p:nvPr>
+        </p:nvSpPr>
+        <p:spPr/>
+        <p:txBody>
+          <a:bodyPr/>
+          <a:lstStyle/>
+          <a:p>
+            <a:r>
+              <a:t>ДЕМО: какво се случва ако забравим connection.Open()? InvalidOperationException! Затова using е задължително.</a:t>
+            </a:r>
+          </a:p>
+        </p:txBody>
+      </p:sp>
+      <p:sp>
+        <p:nvSpPr>
+          <p:cNvPr id="4" name="Slide Number Placeholder 3"/>
+          <p:cNvSpPr>
+            <a:spLocks noGrp="1"/>
+          </p:cNvSpPr>
+          <p:nvPr>
+            <p:ph type="sldNum" idx="5" sz="quarter"/>
+          </p:nvPr>
+        </p:nvSpPr>
+        <p:spPr/>
+      </p:sp>
+    </p:spTree>
+  </p:cSld>
+  <p:clrMapOvr>
+    <a:masterClrMapping/>
+  </p:clrMapOvr>
+</p:notes>
+</file>
+
+<file path=ppt/notesSlides/notesSlide6.xml><?xml version="1.0" encoding="utf-8"?>
+<p:notes xmlns:a="http://schemas.openxmlformats.org/drawingml/2006/main" xmlns:p="http://schemas.openxmlformats.org/presentationml/2006/main" xmlns:r="http://schemas.openxmlformats.org/officeDocument/2006/relationships">
+  <p:cSld>
+    <p:spTree>
+      <p:nvGrpSpPr>
+        <p:cNvPr id="1" name=""/>
+        <p:cNvGrpSpPr/>
+        <p:nvPr/>
+      </p:nvGrpSpPr>
+      <p:grpSpPr>
+        <a:xfrm>
+          <a:off x="0" y="0"/>
+          <a:ext cx="0" cy="0"/>
+          <a:chOff x="0" y="0"/>
+          <a:chExt cx="0" cy="0"/>
+        </a:xfrm>
+      </p:grpSpPr>
+      <p:sp>
+        <p:nvSpPr>
+          <p:cNvPr id="2" name="Slide Image Placeholder 1"/>
+          <p:cNvSpPr>
+            <a:spLocks noGrp="1"/>
+          </p:cNvSpPr>
+          <p:nvPr>
+            <p:ph type="sldImg" idx="2"/>
+          </p:nvPr>
+        </p:nvSpPr>
+        <p:spPr/>
+      </p:sp>
+      <p:sp>
+        <p:nvSpPr>
+          <p:cNvPr id="3" name="Notes Placeholder 2"/>
+          <p:cNvSpPr>
+            <a:spLocks noGrp="1"/>
+          </p:cNvSpPr>
+          <p:nvPr>
+            <p:ph type="body" idx="3" sz="quarter"/>
+          </p:nvPr>
+        </p:nvSpPr>
+        <p:spPr/>
+        <p:txBody>
+          <a:bodyPr/>
+          <a:lstStyle/>
+          <a:p>
+            <a:r>
+              <a:t>Коннекшън пул: .NET не затваря физически при Close() - връща в пула. По подразбиране: 100 връзки максимум.</a:t>
+            </a:r>
+          </a:p>
+        </p:txBody>
+      </p:sp>
+      <p:sp>
+        <p:nvSpPr>
+          <p:cNvPr id="4" name="Slide Number Placeholder 3"/>
+          <p:cNvSpPr>
+            <a:spLocks noGrp="1"/>
+          </p:cNvSpPr>
+          <p:nvPr>
+            <p:ph type="sldNum" idx="5" sz="quarter"/>
+          </p:nvPr>
+        </p:nvSpPr>
+        <p:spPr/>
+      </p:sp>
+    </p:spTree>
+  </p:cSld>
+  <p:clrMapOvr>
+    <a:masterClrMapping/>
+  </p:clrMapOvr>
+</p:notes>
+</file>
+
+<file path=ppt/notesSlides/notesSlide7.xml><?xml version="1.0" encoding="utf-8"?>
+<p:notes xmlns:a="http://schemas.openxmlformats.org/drawingml/2006/main" xmlns:p="http://schemas.openxmlformats.org/presentationml/2006/main" xmlns:r="http://schemas.openxmlformats.org/officeDocument/2006/relationships">
+  <p:cSld>
+    <p:spTree>
+      <p:nvGrpSpPr>
+        <p:cNvPr id="1" name=""/>
+        <p:cNvGrpSpPr/>
+        <p:nvPr/>
+      </p:nvGrpSpPr>
+      <p:grpSpPr>
+        <a:xfrm>
+          <a:off x="0" y="0"/>
+          <a:ext cx="0" cy="0"/>
+          <a:chOff x="0" y="0"/>
+          <a:chExt cx="0" cy="0"/>
+        </a:xfrm>
+      </p:grpSpPr>
+      <p:sp>
+        <p:nvSpPr>
+          <p:cNvPr id="2" name="Slide Image Placeholder 1"/>
+          <p:cNvSpPr>
+            <a:spLocks noGrp="1"/>
+          </p:cNvSpPr>
+          <p:nvPr>
+            <p:ph type="sldImg" idx="2"/>
+          </p:nvPr>
+        </p:nvSpPr>
+        <p:spPr/>
+      </p:sp>
+      <p:sp>
+        <p:nvSpPr>
+          <p:cNvPr id="3" name="Notes Placeholder 2"/>
+          <p:cNvSpPr>
+            <a:spLocks noGrp="1"/>
+          </p:cNvSpPr>
+          <p:nvPr>
+            <p:ph type="body" idx="3" sz="quarter"/>
+          </p:nvPr>
+        </p:nvSpPr>
+        <p:spPr/>
+        <p:txBody>
+          <a:bodyPr/>
+          <a:lstStyle/>
+          <a:p>
+            <a:r>
+              <a:t>ExecuteScalar() → 1 поле (COUNT, MAX). ExecuteReader() → много редове (SELECT). ExecuteNonQuery() → без резултат (INSERT/UPDATE/DELETE).</a:t>
+            </a:r>
+          </a:p>
+        </p:txBody>
+      </p:sp>
+      <p:sp>
+        <p:nvSpPr>
+          <p:cNvPr id="4" name="Slide Number Placeholder 3"/>
+          <p:cNvSpPr>
+            <a:spLocks noGrp="1"/>
+          </p:cNvSpPr>
+          <p:nvPr>
+            <p:ph type="sldNum" idx="5" sz="quarter"/>
+          </p:nvPr>
+        </p:nvSpPr>
+        <p:spPr/>
+      </p:sp>
+    </p:spTree>
+  </p:cSld>
+  <p:clrMapOvr>
+    <a:masterClrMapping/>
+  </p:clrMapOvr>
+</p:notes>
+</file>
+
+<file path=ppt/notesSlides/notesSlide8.xml><?xml version="1.0" encoding="utf-8"?>
+<p:notes xmlns:a="http://schemas.openxmlformats.org/drawingml/2006/main" xmlns:p="http://schemas.openxmlformats.org/presentationml/2006/main" xmlns:r="http://schemas.openxmlformats.org/officeDocument/2006/relationships">
+  <p:cSld>
+    <p:spTree>
+      <p:nvGrpSpPr>
+        <p:cNvPr id="1" name=""/>
+        <p:cNvGrpSpPr/>
+        <p:nvPr/>
+      </p:nvGrpSpPr>
+      <p:grpSpPr>
+        <a:xfrm>
+          <a:off x="0" y="0"/>
+          <a:ext cx="0" cy="0"/>
+          <a:chOff x="0" y="0"/>
+          <a:chExt cx="0" cy="0"/>
+        </a:xfrm>
+      </p:grpSpPr>
+      <p:sp>
+        <p:nvSpPr>
+          <p:cNvPr id="2" name="Slide Image Placeholder 1"/>
+          <p:cNvSpPr>
+            <a:spLocks noGrp="1"/>
+          </p:cNvSpPr>
+          <p:nvPr>
+            <p:ph type="sldImg" idx="2"/>
+          </p:nvPr>
+        </p:nvSpPr>
+        <p:spPr/>
+      </p:sp>
+      <p:sp>
+        <p:nvSpPr>
+          <p:cNvPr id="3" name="Notes Placeholder 2"/>
+          <p:cNvSpPr>
+            <a:spLocks noGrp="1"/>
+          </p:cNvSpPr>
+          <p:nvPr>
+            <p:ph type="body" idx="3" sz="quarter"/>
+          </p:nvPr>
+        </p:nvSpPr>
+        <p:spPr/>
+        <p:txBody>
+          <a:bodyPr/>
+          <a:lstStyle/>
+          <a:p>
+            <a:r>
+              <a:t>ExecuteScalar на SELECT COUNT(*) → връща 0 ако таблицата е празна. Винаги try-catch в production код.</a:t>
+            </a:r>
+          </a:p>
+        </p:txBody>
+      </p:sp>
+      <p:sp>
+        <p:nvSpPr>
+          <p:cNvPr id="4" name="Slide Number Placeholder 3"/>
+          <p:cNvSpPr>
+            <a:spLocks noGrp="1"/>
+          </p:cNvSpPr>
+          <p:nvPr>
+            <p:ph type="sldNum" idx="5" sz="quarter"/>
+          </p:nvPr>
+        </p:nvSpPr>
+        <p:spPr/>
+      </p:sp>
+    </p:spTree>
+  </p:cSld>
+  <p:clrMapOvr>
+    <a:masterClrMapping/>
+  </p:clrMapOvr>
+</p:notes>
+</file>
+
+<file path=ppt/notesSlides/notesSlide9.xml><?xml version="1.0" encoding="utf-8"?>
+<p:notes xmlns:a="http://schemas.openxmlformats.org/drawingml/2006/main" xmlns:p="http://schemas.openxmlformats.org/presentationml/2006/main" xmlns:r="http://schemas.openxmlformats.org/officeDocument/2006/relationships">
+  <p:cSld>
+    <p:spTree>
+      <p:nvGrpSpPr>
+        <p:cNvPr id="1" name=""/>
+        <p:cNvGrpSpPr/>
+        <p:nvPr/>
+      </p:nvGrpSpPr>
+      <p:grpSpPr>
+        <a:xfrm>
+          <a:off x="0" y="0"/>
+          <a:ext cx="0" cy="0"/>
+          <a:chOff x="0" y="0"/>
+          <a:chExt cx="0" cy="0"/>
+        </a:xfrm>
+      </p:grpSpPr>
+      <p:sp>
+        <p:nvSpPr>
+          <p:cNvPr id="2" name="Slide Image Placeholder 1"/>
+          <p:cNvSpPr>
+            <a:spLocks noGrp="1"/>
+          </p:cNvSpPr>
+          <p:nvPr>
+            <p:ph type="sldImg" idx="2"/>
+          </p:nvPr>
+        </p:nvSpPr>
+        <p:spPr/>
+      </p:sp>
+      <p:sp>
+        <p:nvSpPr>
+          <p:cNvPr id="3" name="Notes Placeholder 2"/>
+          <p:cNvSpPr>
+            <a:spLocks noGrp="1"/>
+          </p:cNvSpPr>
+          <p:nvPr>
+            <p:ph type="body" idx="3" sz="quarter"/>
+          </p:nvPr>
+        </p:nvSpPr>
+        <p:spPr/>
+        <p:txBody>
+          <a:bodyPr/>
+          <a:lstStyle/>
+          <a:p>
+            <a:r>
+              <a:t>SqlDataReader е FORWARD-ONLY курсор. Read() напред с 1 ред. HasRows преди цикъла. reader['Name'] е по-четимо от reader[0].</a:t>
+            </a:r>
+          </a:p>
+        </p:txBody>
+      </p:sp>
+      <p:sp>
+        <p:nvSpPr>
+          <p:cNvPr id="4" name="Slide Number Placeholder 3"/>
+          <p:cNvSpPr>
+            <a:spLocks noGrp="1"/>
+          </p:cNvSpPr>
+          <p:nvPr>
+            <p:ph type="sldNum" idx="5" sz="quarter"/>
+          </p:nvPr>
+        </p:nvSpPr>
+        <p:spPr/>
+      </p:sp>
+    </p:spTree>
   </p:cSld>
   <p:clrMapOvr>
     <a:masterClrMapping/>
@@ -6296,6 +7002,181 @@
         <p14:creationId xmlns:p14="http://schemas.microsoft.com/office/powerpoint/2010/main" val="1241344677"/>
       </p:ext>
     </p:extLst>
+  </p:cSld>
+  <p:clrMapOvr>
+    <a:masterClrMapping/>
+  </p:clrMapOvr>
+</p:sld>
+</file>
+
+<file path=ppt/slides/slide13.xml><?xml version="1.0" encoding="utf-8"?>
+<p:sld xmlns:a="http://schemas.openxmlformats.org/drawingml/2006/main" xmlns:p="http://schemas.openxmlformats.org/presentationml/2006/main" xmlns:r="http://schemas.openxmlformats.org/officeDocument/2006/relationships">
+  <p:cSld>
+    <p:spTree>
+      <p:nvGrpSpPr>
+        <p:cNvPr id="1" name=""/>
+        <p:cNvGrpSpPr/>
+        <p:nvPr/>
+      </p:nvGrpSpPr>
+      <p:grpSpPr/>
+      <p:sp>
+        <p:nvSpPr>
+          <p:cNvPr id="2" name="Title 1"/>
+          <p:cNvSpPr>
+            <a:spLocks noGrp="1"/>
+          </p:cNvSpPr>
+          <p:nvPr>
+            <p:ph type="title"/>
+          </p:nvPr>
+        </p:nvSpPr>
+        <p:spPr/>
+        <p:txBody>
+          <a:bodyPr/>
+          <a:lstStyle/>
+          <a:p>
+            <a:r>
+              <a:t>ExecuteScalar / ExecuteReader / ExecuteNonQuery</a:t>
+            </a:r>
+          </a:p>
+        </p:txBody>
+      </p:sp>
+      <p:sp>
+        <p:nvSpPr>
+          <p:cNvPr id="3" name="Content Placeholder 2"/>
+          <p:cNvSpPr>
+            <a:spLocks noGrp="1"/>
+          </p:cNvSpPr>
+          <p:nvPr>
+            <p:ph idx="1"/>
+          </p:nvPr>
+        </p:nvSpPr>
+        <p:spPr/>
+        <p:txBody>
+          <a:bodyPr/>
+          <a:lstStyle/>
+          <a:p>
+            <a:r>
+              <a:t>ExecuteScalar() → 1 поле: SELECT COUNT(*), MAX(Price)</a:t>
+            </a:r>
+          </a:p>
+          <a:p>
+            <a:r>
+              <a:t>ExecuteReader() → много редове: SELECT * FROM ...</a:t>
+            </a:r>
+          </a:p>
+          <a:p>
+            <a:r>
+              <a:t>ExecuteNonQuery() → брой редове: INSERT, UPDATE, DELETE</a:t>
+            </a:r>
+          </a:p>
+          <a:p>
+            <a:r>
+              <a:t>Честа грешка: ExecuteScalar() на SELECT с много редове = само първата клетка!</a:t>
+            </a:r>
+          </a:p>
+          <a:p>
+            <a:r>
+              <a:t>ExecuteNonQuery() = 0 → нищо не е променено!</a:t>
+            </a:r>
+          </a:p>
+        </p:txBody>
+      </p:sp>
+    </p:spTree>
+  </p:cSld>
+  <p:clrMapOvr>
+    <a:masterClrMapping/>
+  </p:clrMapOvr>
+</p:sld>
+</file>
+
+<file path=ppt/slides/slide14.xml><?xml version="1.0" encoding="utf-8"?>
+<p:sld xmlns:a="http://schemas.openxmlformats.org/drawingml/2006/main" xmlns:p="http://schemas.openxmlformats.org/presentationml/2006/main" xmlns:r="http://schemas.openxmlformats.org/officeDocument/2006/relationships">
+  <p:cSld>
+    <p:spTree>
+      <p:nvGrpSpPr>
+        <p:cNvPr id="1" name=""/>
+        <p:cNvGrpSpPr/>
+        <p:nvPr/>
+      </p:nvGrpSpPr>
+      <p:grpSpPr/>
+      <p:sp>
+        <p:nvSpPr>
+          <p:cNvPr id="2" name="Title 1"/>
+          <p:cNvSpPr>
+            <a:spLocks noGrp="1"/>
+          </p:cNvSpPr>
+          <p:nvPr>
+            <p:ph type="title"/>
+          </p:nvPr>
+        </p:nvSpPr>
+        <p:spPr/>
+        <p:txBody>
+          <a:bodyPr/>
+          <a:lstStyle/>
+          <a:p>
+            <a:r>
+              <a:t>Пълен пример: Извеждане на служители</a:t>
+            </a:r>
+          </a:p>
+        </p:txBody>
+      </p:sp>
+      <p:sp>
+        <p:nvSpPr>
+          <p:cNvPr id="3" name="Content Placeholder 2"/>
+          <p:cNvSpPr>
+            <a:spLocks noGrp="1"/>
+          </p:cNvSpPr>
+          <p:nvPr>
+            <p:ph idx="1"/>
+          </p:nvPr>
+        </p:nvSpPr>
+        <p:spPr/>
+        <p:txBody>
+          <a:bodyPr/>
+          <a:lstStyle/>
+          <a:p>
+            <a:r>
+              <a:t>string sql = "SELECT Id, FirstName FROM Employees";</a:t>
+            </a:r>
+          </a:p>
+          <a:p>
+            <a:r>
+              <a:t>using (SqlConnection conn = new SqlConnection(connStr))</a:t>
+            </a:r>
+          </a:p>
+          <a:p>
+            <a:r>
+              <a:t>{ conn.Open();</a:t>
+            </a:r>
+          </a:p>
+          <a:p>
+            <a:r>
+              <a:t>  SqlCommand cmd = new SqlCommand(sql, conn);</a:t>
+            </a:r>
+          </a:p>
+          <a:p>
+            <a:r>
+              <a:t>  using (SqlDataReader r = cmd.ExecuteReader())</a:t>
+            </a:r>
+          </a:p>
+          <a:p>
+            <a:r>
+              <a:t>  { while (r.Read())</a:t>
+            </a:r>
+          </a:p>
+          <a:p>
+            <a:r>
+              <a:t>    { Console.WriteLine($"{r[0]} {r[1]}"); } } }</a:t>
+            </a:r>
+          </a:p>
+          <a:p>
+            <a:r>
+              <a:t>Шаблон: Connection → Command → Reader → Read()</a:t>
+            </a:r>
+          </a:p>
+        </p:txBody>
+      </p:sp>
+    </p:spTree>
   </p:cSld>
   <p:clrMapOvr>
     <a:masterClrMapping/>
